--- a/MedSafe_Backend_Architecture.pptx
+++ b/MedSafe_Backend_Architecture.pptx
@@ -5196,7 +5196,7 @@
               </a:defRPr>
             </a:pPr>
             <a:r>
-              <a:t>每一层模型各司其职，通过 Orchestrator 统一调度</a:t>
+              <a:t>每一层模型各司其职，通过 Orchestrator 统一调度，数据自上而下流转</a:t>
             </a:r>
           </a:p>
         </p:txBody>
@@ -5209,8 +5209,84 @@
         </p:nvSpPr>
         <p:spPr>
           <a:xfrm>
-            <a:off x="548640" y="1463040"/>
-            <a:ext cx="3474720" cy="1097280"/>
+            <a:off x="548640" y="1417320"/>
+            <a:ext cx="2377440" cy="1005840"/>
+          </a:xfrm>
+          <a:prstGeom prst="roundRect">
+            <a:avLst/>
+          </a:prstGeom>
+          <a:solidFill>
+            <a:srgbClr val="00D2FF"/>
+          </a:solidFill>
+          <a:ln>
+            <a:noFill/>
+          </a:ln>
+        </p:spPr>
+        <p:style>
+          <a:lnRef idx="1">
+            <a:schemeClr val="accent1"/>
+          </a:lnRef>
+          <a:fillRef idx="3">
+            <a:schemeClr val="accent1"/>
+          </a:fillRef>
+          <a:effectRef idx="2">
+            <a:schemeClr val="accent1"/>
+          </a:effectRef>
+          <a:fontRef idx="minor">
+            <a:schemeClr val="lt1"/>
+          </a:fontRef>
+        </p:style>
+        <p:txBody>
+          <a:bodyPr rtlCol="0" anchor="ctr" wrap="square"/>
+          <a:lstStyle/>
+          <a:p>
+            <a:pPr algn="ctr">
+              <a:defRPr sz="1100" b="1">
+                <a:solidFill>
+                  <a:srgbClr val="1A1A2E"/>
+                </a:solidFill>
+              </a:defRPr>
+            </a:pPr>
+            <a:r>
+              <a:t>Layer 1</a:t>
+            </a:r>
+          </a:p>
+          <a:p>
+            <a:pPr algn="ctr">
+              <a:defRPr sz="1400" b="1">
+                <a:solidFill>
+                  <a:srgbClr val="1A1A2E"/>
+                </a:solidFill>
+              </a:defRPr>
+            </a:pPr>
+            <a:r>
+              <a:t>主LLM推理层</a:t>
+            </a:r>
+          </a:p>
+          <a:p>
+            <a:pPr algn="ctr">
+              <a:defRPr sz="900">
+                <a:solidFill>
+                  <a:srgbClr val="202040"/>
+                </a:solidFill>
+              </a:defRPr>
+            </a:pPr>
+            <a:r>
+              <a:t>DeepSeek-Chat</a:t>
+            </a:r>
+          </a:p>
+        </p:txBody>
+      </p:sp>
+      <p:sp>
+        <p:nvSpPr>
+          <p:cNvPr id="5" name="Rounded Rectangle 4"/>
+          <p:cNvSpPr/>
+          <p:nvPr/>
+        </p:nvSpPr>
+        <p:spPr>
+          <a:xfrm>
+            <a:off x="3017520" y="1417320"/>
+            <a:ext cx="8229600" cy="1005840"/>
           </a:xfrm>
           <a:prstGeom prst="roundRect">
             <a:avLst/>
@@ -5243,78 +5319,30 @@
           <a:lstStyle/>
           <a:p>
             <a:pPr algn="ctr">
-              <a:defRPr sz="1600" b="1">
-                <a:solidFill>
-                  <a:srgbClr val="00D2FF"/>
-                </a:solidFill>
-              </a:defRPr>
-            </a:pPr>
-            <a:r>
-              <a:t>Layer 1: 主LLM — DeepSeek-Chat</a:t>
-            </a:r>
-          </a:p>
-          <a:p>
-            <a:pPr>
-              <a:defRPr sz="1100">
-                <a:solidFill>
-                  <a:srgbClr val="AAAACC"/>
-                </a:solidFill>
-              </a:defRPr>
-            </a:pPr>
-            <a:r>
-              <a:t>  • 所有专家Agent的推理引擎</a:t>
-            </a:r>
-          </a:p>
-          <a:p>
-            <a:pPr>
-              <a:defRPr sz="1100">
-                <a:solidFill>
-                  <a:srgbClr val="AAAACC"/>
-                </a:solidFill>
-              </a:defRPr>
-            </a:pPr>
-            <a:r>
-              <a:t>  • 包括：临床药师、内科、过敏专科、药房库存、专科路由</a:t>
-            </a:r>
-          </a:p>
-          <a:p>
-            <a:pPr>
-              <a:defRPr sz="1100">
-                <a:solidFill>
-                  <a:srgbClr val="AAAACC"/>
-                </a:solidFill>
-              </a:defRPr>
-            </a:pPr>
-            <a:r>
-              <a:t>  • 首席审查仲裁、辩论评论家、协调员澄清</a:t>
-            </a:r>
-          </a:p>
-          <a:p>
-            <a:pPr>
-              <a:defRPr sz="1100">
-                <a:solidFill>
-                  <a:srgbClr val="AAAACC"/>
-                </a:solidFill>
-              </a:defRPr>
-            </a:pPr>
-            <a:r>
-              <a:t>  • 统一通过 OpenAI 兼容 API 调用，输出结构化 JSON</a:t>
-            </a:r>
-          </a:p>
-        </p:txBody>
-      </p:sp>
-      <p:sp>
-        <p:nvSpPr>
-          <p:cNvPr id="5" name="Right Arrow 4"/>
+              <a:defRPr sz="1200">
+                <a:solidFill>
+                  <a:srgbClr val="FFFFFF"/>
+                </a:solidFill>
+              </a:defRPr>
+            </a:pPr>
+            <a:r>
+              <a:t>5个专家Agent并行推理  |  辩论Critic/Moderator  |  首席仲裁 &amp; 协调员澄清  |  OpenAI兼容API → 结构化JSON输出</a:t>
+            </a:r>
+          </a:p>
+        </p:txBody>
+      </p:sp>
+      <p:sp>
+        <p:nvSpPr>
+          <p:cNvPr id="6" name="Down Arrow 5"/>
           <p:cNvSpPr/>
           <p:nvPr/>
         </p:nvSpPr>
         <p:spPr>
           <a:xfrm>
-            <a:off x="4389120" y="1828800"/>
-            <a:ext cx="457200" cy="274320"/>
-          </a:xfrm>
-          <a:prstGeom prst="rightArrow">
+            <a:off x="7040880" y="2423160"/>
+            <a:ext cx="201168" cy="128016"/>
+          </a:xfrm>
+          <a:prstGeom prst="downArrow">
             <a:avLst/>
           </a:prstGeom>
           <a:solidFill>
@@ -5348,14 +5376,90 @@
       </p:sp>
       <p:sp>
         <p:nvSpPr>
-          <p:cNvPr id="6" name="Rounded Rectangle 5"/>
+          <p:cNvPr id="7" name="Rounded Rectangle 6"/>
           <p:cNvSpPr/>
           <p:nvPr/>
         </p:nvSpPr>
         <p:spPr>
           <a:xfrm>
-            <a:off x="548640" y="2697480"/>
-            <a:ext cx="3474720" cy="1097280"/>
+            <a:off x="548640" y="2532888"/>
+            <a:ext cx="2377440" cy="1005840"/>
+          </a:xfrm>
+          <a:prstGeom prst="roundRect">
+            <a:avLst/>
+          </a:prstGeom>
+          <a:solidFill>
+            <a:srgbClr val="00E696"/>
+          </a:solidFill>
+          <a:ln>
+            <a:noFill/>
+          </a:ln>
+        </p:spPr>
+        <p:style>
+          <a:lnRef idx="1">
+            <a:schemeClr val="accent1"/>
+          </a:lnRef>
+          <a:fillRef idx="3">
+            <a:schemeClr val="accent1"/>
+          </a:fillRef>
+          <a:effectRef idx="2">
+            <a:schemeClr val="accent1"/>
+          </a:effectRef>
+          <a:fontRef idx="minor">
+            <a:schemeClr val="lt1"/>
+          </a:fontRef>
+        </p:style>
+        <p:txBody>
+          <a:bodyPr rtlCol="0" anchor="ctr" wrap="square"/>
+          <a:lstStyle/>
+          <a:p>
+            <a:pPr algn="ctr">
+              <a:defRPr sz="1100" b="1">
+                <a:solidFill>
+                  <a:srgbClr val="1A1A2E"/>
+                </a:solidFill>
+              </a:defRPr>
+            </a:pPr>
+            <a:r>
+              <a:t>Layer 2</a:t>
+            </a:r>
+          </a:p>
+          <a:p>
+            <a:pPr algn="ctr">
+              <a:defRPr sz="1400" b="1">
+                <a:solidFill>
+                  <a:srgbClr val="1A1A2E"/>
+                </a:solidFill>
+              </a:defRPr>
+            </a:pPr>
+            <a:r>
+              <a:t>视觉理解层</a:t>
+            </a:r>
+          </a:p>
+          <a:p>
+            <a:pPr algn="ctr">
+              <a:defRPr sz="900">
+                <a:solidFill>
+                  <a:srgbClr val="202040"/>
+                </a:solidFill>
+              </a:defRPr>
+            </a:pPr>
+            <a:r>
+              <a:t>Qwen3-VL (百炼)</a:t>
+            </a:r>
+          </a:p>
+        </p:txBody>
+      </p:sp>
+      <p:sp>
+        <p:nvSpPr>
+          <p:cNvPr id="8" name="Rounded Rectangle 7"/>
+          <p:cNvSpPr/>
+          <p:nvPr/>
+        </p:nvSpPr>
+        <p:spPr>
+          <a:xfrm>
+            <a:off x="3017520" y="2532888"/>
+            <a:ext cx="8229600" cy="1005840"/>
           </a:xfrm>
           <a:prstGeom prst="roundRect">
             <a:avLst/>
@@ -5388,78 +5492,30 @@
           <a:lstStyle/>
           <a:p>
             <a:pPr algn="ctr">
-              <a:defRPr sz="1600" b="1">
-                <a:solidFill>
-                  <a:srgbClr val="00E696"/>
-                </a:solidFill>
-              </a:defRPr>
-            </a:pPr>
-            <a:r>
-              <a:t>Layer 2: 视觉模型 — Qwen3-VL</a:t>
-            </a:r>
-          </a:p>
-          <a:p>
-            <a:pPr>
-              <a:defRPr sz="1100">
-                <a:solidFill>
-                  <a:srgbClr val="AAAACC"/>
-                </a:solidFill>
-              </a:defRPr>
-            </a:pPr>
-            <a:r>
-              <a:t>  • 百炼 Model Studio API 调用</a:t>
-            </a:r>
-          </a:p>
-          <a:p>
-            <a:pPr>
-              <a:defRPr sz="1100">
-                <a:solidFill>
-                  <a:srgbClr val="AAAACC"/>
-                </a:solidFill>
-              </a:defRPr>
-            </a:pPr>
-            <a:r>
-              <a:t>  • 最多分析12张医学影像 (X-ray/CT/MRI)</a:t>
-            </a:r>
-          </a:p>
-          <a:p>
-            <a:pPr>
-              <a:defRPr sz="1100">
-                <a:solidFill>
-                  <a:srgbClr val="AAAACC"/>
-                </a:solidFill>
-              </a:defRPr>
-            </a:pPr>
-            <a:r>
-              <a:t>  • 支持分割标注叠加图像输入</a:t>
-            </a:r>
-          </a:p>
-          <a:p>
-            <a:pPr>
-              <a:defRPr sz="1100">
-                <a:solidFill>
-                  <a:srgbClr val="AAAACC"/>
-                </a:solidFill>
-              </a:defRPr>
-            </a:pPr>
-            <a:r>
-              <a:t>  • 输出：临床表现、影像发现、药物推荐、诊断等</a:t>
-            </a:r>
-          </a:p>
-        </p:txBody>
-      </p:sp>
-      <p:sp>
-        <p:nvSpPr>
-          <p:cNvPr id="7" name="Right Arrow 6"/>
+              <a:defRPr sz="1200">
+                <a:solidFill>
+                  <a:srgbClr val="FFFFFF"/>
+                </a:solidFill>
+              </a:defRPr>
+            </a:pPr>
+            <a:r>
+              <a:t>最多12张医学影像  |  X-ray / CT / MRI  |  分割标注叠加输入  |  输出: 临床表现, 影像发现, 药物推荐, 诊断, 风险等级</a:t>
+            </a:r>
+          </a:p>
+        </p:txBody>
+      </p:sp>
+      <p:sp>
+        <p:nvSpPr>
+          <p:cNvPr id="9" name="Down Arrow 8"/>
           <p:cNvSpPr/>
           <p:nvPr/>
         </p:nvSpPr>
         <p:spPr>
           <a:xfrm>
-            <a:off x="4389120" y="3063240"/>
-            <a:ext cx="457200" cy="274320"/>
-          </a:xfrm>
-          <a:prstGeom prst="rightArrow">
+            <a:off x="7040880" y="3538728"/>
+            <a:ext cx="201168" cy="128016"/>
+          </a:xfrm>
+          <a:prstGeom prst="downArrow">
             <a:avLst/>
           </a:prstGeom>
           <a:solidFill>
@@ -5493,14 +5549,90 @@
       </p:sp>
       <p:sp>
         <p:nvSpPr>
-          <p:cNvPr id="8" name="Rounded Rectangle 7"/>
+          <p:cNvPr id="10" name="Rounded Rectangle 9"/>
           <p:cNvSpPr/>
           <p:nvPr/>
         </p:nvSpPr>
         <p:spPr>
           <a:xfrm>
-            <a:off x="548640" y="3931920"/>
-            <a:ext cx="3474720" cy="1097280"/>
+            <a:off x="548640" y="3648456"/>
+            <a:ext cx="2377440" cy="1005840"/>
+          </a:xfrm>
+          <a:prstGeom prst="roundRect">
+            <a:avLst/>
+          </a:prstGeom>
+          <a:solidFill>
+            <a:srgbClr val="7B2FFF"/>
+          </a:solidFill>
+          <a:ln>
+            <a:noFill/>
+          </a:ln>
+        </p:spPr>
+        <p:style>
+          <a:lnRef idx="1">
+            <a:schemeClr val="accent1"/>
+          </a:lnRef>
+          <a:fillRef idx="3">
+            <a:schemeClr val="accent1"/>
+          </a:fillRef>
+          <a:effectRef idx="2">
+            <a:schemeClr val="accent1"/>
+          </a:effectRef>
+          <a:fontRef idx="minor">
+            <a:schemeClr val="lt1"/>
+          </a:fontRef>
+        </p:style>
+        <p:txBody>
+          <a:bodyPr rtlCol="0" anchor="ctr" wrap="square"/>
+          <a:lstStyle/>
+          <a:p>
+            <a:pPr algn="ctr">
+              <a:defRPr sz="1100" b="1">
+                <a:solidFill>
+                  <a:srgbClr val="1A1A2E"/>
+                </a:solidFill>
+              </a:defRPr>
+            </a:pPr>
+            <a:r>
+              <a:t>Layer 3</a:t>
+            </a:r>
+          </a:p>
+          <a:p>
+            <a:pPr algn="ctr">
+              <a:defRPr sz="1400" b="1">
+                <a:solidFill>
+                  <a:srgbClr val="1A1A2E"/>
+                </a:solidFill>
+              </a:defRPr>
+            </a:pPr>
+            <a:r>
+              <a:t>多模态融合层</a:t>
+            </a:r>
+          </a:p>
+          <a:p>
+            <a:pPr algn="ctr">
+              <a:defRPr sz="900">
+                <a:solidFill>
+                  <a:srgbClr val="202040"/>
+                </a:solidFill>
+              </a:defRPr>
+            </a:pPr>
+            <a:r>
+              <a:t>DeepSeek-Chat (专用实例)</a:t>
+            </a:r>
+          </a:p>
+        </p:txBody>
+      </p:sp>
+      <p:sp>
+        <p:nvSpPr>
+          <p:cNvPr id="11" name="Rounded Rectangle 10"/>
+          <p:cNvSpPr/>
+          <p:nvPr/>
+        </p:nvSpPr>
+        <p:spPr>
+          <a:xfrm>
+            <a:off x="3017520" y="3648456"/>
+            <a:ext cx="8229600" cy="1005840"/>
           </a:xfrm>
           <a:prstGeom prst="roundRect">
             <a:avLst/>
@@ -5533,66 +5665,30 @@
           <a:lstStyle/>
           <a:p>
             <a:pPr algn="ctr">
-              <a:defRPr sz="1600" b="1">
-                <a:solidFill>
-                  <a:srgbClr val="7B2FFF"/>
-                </a:solidFill>
-              </a:defRPr>
-            </a:pPr>
-            <a:r>
-              <a:t>Layer 3: 合成模型 — DeepSeek-Chat (专用实例)</a:t>
-            </a:r>
-          </a:p>
-          <a:p>
-            <a:pPr>
-              <a:defRPr sz="1100">
-                <a:solidFill>
-                  <a:srgbClr val="AAAACC"/>
-                </a:solidFill>
-              </a:defRPr>
-            </a:pPr>
-            <a:r>
-              <a:t>  • 融合 VLM 分析结果 + 多Agent药物审查意见</a:t>
-            </a:r>
-          </a:p>
-          <a:p>
-            <a:pPr>
-              <a:defRPr sz="1100">
-                <a:solidFill>
-                  <a:srgbClr val="AAAACC"/>
-                </a:solidFill>
-              </a:defRPr>
-            </a:pPr>
-            <a:r>
-              <a:t>  • 生成7节结构化临床报告</a:t>
-            </a:r>
-          </a:p>
-          <a:p>
-            <a:pPr>
-              <a:defRPr sz="1100">
-                <a:solidFill>
-                  <a:srgbClr val="AAAACC"/>
-                </a:solidFill>
-              </a:defRPr>
-            </a:pPr>
-            <a:r>
-              <a:t>  • 临床分析 / 影像发现 / 用药建议 / 药学评估 / 过敏分析 / 麻醉手术 / 风险总结</a:t>
-            </a:r>
-          </a:p>
-        </p:txBody>
-      </p:sp>
-      <p:sp>
-        <p:nvSpPr>
-          <p:cNvPr id="9" name="Right Arrow 8"/>
+              <a:defRPr sz="1200">
+                <a:solidFill>
+                  <a:srgbClr val="FFFFFF"/>
+                </a:solidFill>
+              </a:defRPr>
+            </a:pPr>
+            <a:r>
+              <a:t>VLM结果 + 5个Agent审查意见 + 仲裁结论 + 规则引擎输出  →  7节结构化ClinicalReport  |  逐项交叉验证 &amp; 去重合并</a:t>
+            </a:r>
+          </a:p>
+        </p:txBody>
+      </p:sp>
+      <p:sp>
+        <p:nvSpPr>
+          <p:cNvPr id="12" name="Down Arrow 11"/>
           <p:cNvSpPr/>
           <p:nvPr/>
         </p:nvSpPr>
         <p:spPr>
           <a:xfrm>
-            <a:off x="4389120" y="4297680"/>
-            <a:ext cx="457200" cy="274320"/>
-          </a:xfrm>
-          <a:prstGeom prst="rightArrow">
+            <a:off x="7040880" y="4654296"/>
+            <a:ext cx="201168" cy="128016"/>
+          </a:xfrm>
+          <a:prstGeom prst="downArrow">
             <a:avLst/>
           </a:prstGeom>
           <a:solidFill>
@@ -5626,14 +5722,90 @@
       </p:sp>
       <p:sp>
         <p:nvSpPr>
-          <p:cNvPr id="10" name="Rounded Rectangle 9"/>
+          <p:cNvPr id="13" name="Rounded Rectangle 12"/>
           <p:cNvSpPr/>
           <p:nvPr/>
         </p:nvSpPr>
         <p:spPr>
           <a:xfrm>
-            <a:off x="548640" y="5166360"/>
-            <a:ext cx="3474720" cy="1097280"/>
+            <a:off x="548640" y="4764024"/>
+            <a:ext cx="2377440" cy="1005840"/>
+          </a:xfrm>
+          <a:prstGeom prst="roundRect">
+            <a:avLst/>
+          </a:prstGeom>
+          <a:solidFill>
+            <a:srgbClr val="FF6B6B"/>
+          </a:solidFill>
+          <a:ln>
+            <a:noFill/>
+          </a:ln>
+        </p:spPr>
+        <p:style>
+          <a:lnRef idx="1">
+            <a:schemeClr val="accent1"/>
+          </a:lnRef>
+          <a:fillRef idx="3">
+            <a:schemeClr val="accent1"/>
+          </a:fillRef>
+          <a:effectRef idx="2">
+            <a:schemeClr val="accent1"/>
+          </a:effectRef>
+          <a:fontRef idx="minor">
+            <a:schemeClr val="lt1"/>
+          </a:fontRef>
+        </p:style>
+        <p:txBody>
+          <a:bodyPr rtlCol="0" anchor="ctr" wrap="square"/>
+          <a:lstStyle/>
+          <a:p>
+            <a:pPr algn="ctr">
+              <a:defRPr sz="1100" b="1">
+                <a:solidFill>
+                  <a:srgbClr val="1A1A2E"/>
+                </a:solidFill>
+              </a:defRPr>
+            </a:pPr>
+            <a:r>
+              <a:t>Layer 4</a:t>
+            </a:r>
+          </a:p>
+          <a:p>
+            <a:pPr algn="ctr">
+              <a:defRPr sz="1400" b="1">
+                <a:solidFill>
+                  <a:srgbClr val="1A1A2E"/>
+                </a:solidFill>
+              </a:defRPr>
+            </a:pPr>
+            <a:r>
+              <a:t>本地AI基础层</a:t>
+            </a:r>
+          </a:p>
+          <a:p>
+            <a:pPr algn="ctr">
+              <a:defRPr sz="900">
+                <a:solidFill>
+                  <a:srgbClr val="202040"/>
+                </a:solidFill>
+              </a:defRPr>
+            </a:pPr>
+            <a:r>
+              <a:t>Med7 / BERT / 分割模型</a:t>
+            </a:r>
+          </a:p>
+        </p:txBody>
+      </p:sp>
+      <p:sp>
+        <p:nvSpPr>
+          <p:cNvPr id="14" name="Rounded Rectangle 13"/>
+          <p:cNvSpPr/>
+          <p:nvPr/>
+        </p:nvSpPr>
+        <p:spPr>
+          <a:xfrm>
+            <a:off x="3017520" y="4764024"/>
+            <a:ext cx="8229600" cy="1005840"/>
           </a:xfrm>
           <a:prstGeom prst="roundRect">
             <a:avLst/>
@@ -5666,75 +5838,27 @@
           <a:lstStyle/>
           <a:p>
             <a:pPr algn="ctr">
-              <a:defRPr sz="1600" b="1">
-                <a:solidFill>
-                  <a:srgbClr val="FF6B6B"/>
-                </a:solidFill>
-              </a:defRPr>
-            </a:pPr>
-            <a:r>
-              <a:t>Layer 4: 传统ML模型 (本地推理)</a:t>
-            </a:r>
-          </a:p>
-          <a:p>
-            <a:pPr>
-              <a:defRPr sz="1100">
-                <a:solidFill>
-                  <a:srgbClr val="AAAACC"/>
-                </a:solidFill>
-              </a:defRPr>
-            </a:pPr>
-            <a:r>
-              <a:t>  • Med7 NER: spaCy药物实体抽取 (名称/途径/剂量)</a:t>
-            </a:r>
-          </a:p>
-          <a:p>
-            <a:pPr>
-              <a:defRPr sz="1100">
-                <a:solidFill>
-                  <a:srgbClr val="AAAACC"/>
-                </a:solidFill>
-              </a:defRPr>
-            </a:pPr>
-            <a:r>
-              <a:t>  • DDI-BERT: Bio_ClinicalBERT 药物相互作用分类</a:t>
-            </a:r>
-          </a:p>
-          <a:p>
-            <a:pPr>
-              <a:defRPr sz="1100">
-                <a:solidFill>
-                  <a:srgbClr val="AAAACC"/>
-                </a:solidFill>
-              </a:defRPr>
-            </a:pPr>
-            <a:r>
-              <a:t>  • 嵌入模型: nomic-embed-text → 语义药物搜索</a:t>
-            </a:r>
-          </a:p>
-          <a:p>
-            <a:pPr>
-              <a:defRPr sz="1100">
-                <a:solidFill>
-                  <a:srgbClr val="AAAACC"/>
-                </a:solidFill>
-              </a:defRPr>
-            </a:pPr>
-            <a:r>
-              <a:t>  • 分割模型: TotalSegmentator / VISTA3D / SAM / BraTS / CXR-Lesion</a:t>
-            </a:r>
-          </a:p>
-        </p:txBody>
-      </p:sp>
-      <p:sp>
-        <p:nvSpPr>
-          <p:cNvPr id="11" name="TextBox 10"/>
+              <a:defRPr sz="1200">
+                <a:solidFill>
+                  <a:srgbClr val="FFFFFF"/>
+                </a:solidFill>
+              </a:defRPr>
+            </a:pPr>
+            <a:r>
+              <a:t>Med7 NER: 药物实体抽取  |  DDI-BERT: 相互作用分类  |  Embedding: 语义药物搜索  |  TotalSegmentator / VISTA3D / SAM / BraTS / CXR</a:t>
+            </a:r>
+          </a:p>
+        </p:txBody>
+      </p:sp>
+      <p:sp>
+        <p:nvSpPr>
+          <p:cNvPr id="15" name="TextBox 14"/>
           <p:cNvSpPr txBox="1"/>
           <p:nvPr/>
         </p:nvSpPr>
         <p:spPr>
           <a:xfrm>
-            <a:off x="548640" y="6400800"/>
+            <a:off x="548640" y="5989320"/>
             <a:ext cx="10972800" cy="365760"/>
           </a:xfrm>
           <a:prstGeom prst="rect">
@@ -5749,21 +5873,21 @@
           <a:lstStyle/>
           <a:p>
             <a:pPr algn="l">
-              <a:defRPr sz="1300" b="0">
+              <a:defRPr sz="1200" b="0">
                 <a:solidFill>
                   <a:srgbClr val="666688"/>
                 </a:solidFill>
               </a:defRPr>
             </a:pPr>
             <a:r>
-              <a:t>Orchestrator 通过 ThreadPoolExecutor 并行调度各Agent，确保独立审查互不干扰</a:t>
-            </a:r>
-          </a:p>
-        </p:txBody>
-      </p:sp>
-      <p:sp>
-        <p:nvSpPr>
-          <p:cNvPr id="12" name="TextBox 11"/>
+              <a:t>Orchestrator 通过 ThreadPoolExecutor 并行调用 Layer 1 的 Agent，Layer 4 模型提供辅助特征，Layer 2 独立触发，Layer 3 融合全部输出</a:t>
+            </a:r>
+          </a:p>
+        </p:txBody>
+      </p:sp>
+      <p:sp>
+        <p:nvSpPr>
+          <p:cNvPr id="16" name="TextBox 15"/>
           <p:cNvSpPr txBox="1"/>
           <p:nvPr/>
         </p:nvSpPr>
